--- a/praesentationen/input-07-automatisierung.pptx
+++ b/praesentationen/input-07-automatisierung.pptx
@@ -119,7 +119,7 @@
   <p:extLst>
     <p:ext uri="{521415D9-36F7-43E2-AB2F-B90AF26B5E84}">
       <p14:sectionLst xmlns:p14="http://schemas.microsoft.com/office/powerpoint/2010/main">
-        <p14:section name="IaC" id="{df12d226-0189-bbcc-8450-f6c519b92a1c}">
+        <p14:section name="IaC" id="{645ff9f7-359a-db1c-ce2d-e42ad59523bf}">
           <p14:sldIdLst>
             <p14:sldId id="256"/>
             <p14:sldId id="257"/>
@@ -129,7 +129,7 @@
             <p14:sldId id="261"/>
           </p14:sldIdLst>
         </p14:section>
-        <p14:section name="cloud-init" id="{215e7fbf-4ca4-b327-ee8c-e3e258fbee2f}">
+        <p14:section name="cloud-init" id="{7e75be49-6003-6f54-a29e-bda7035e63d3}">
           <p14:sldIdLst>
             <p14:sldId id="262"/>
             <p14:sldId id="263"/>

--- a/praesentationen/input-07-automatisierung.pptx
+++ b/praesentationen/input-07-automatisierung.pptx
@@ -119,7 +119,7 @@
   <p:extLst>
     <p:ext uri="{521415D9-36F7-43E2-AB2F-B90AF26B5E84}">
       <p14:sectionLst xmlns:p14="http://schemas.microsoft.com/office/powerpoint/2010/main">
-        <p14:section name="IaC" id="{645ff9f7-359a-db1c-ce2d-e42ad59523bf}">
+        <p14:section name="IaC" id="{6737735b-c41b-8d29-3147-040919e95d0a}">
           <p14:sldIdLst>
             <p14:sldId id="256"/>
             <p14:sldId id="257"/>
@@ -129,7 +129,7 @@
             <p14:sldId id="261"/>
           </p14:sldIdLst>
         </p14:section>
-        <p14:section name="cloud-init" id="{7e75be49-6003-6f54-a29e-bda7035e63d3}">
+        <p14:section name="cloud-init" id="{fe6930d5-eb1c-19f1-bf07-b3509a92fd13}">
           <p14:sldIdLst>
             <p14:sldId id="262"/>
             <p14:sldId id="263"/>
@@ -4870,7 +4870,7 @@
                   <a:srgbClr val="6F6F6F"/>
                 </a:solidFill>
               </a:rPr>
-              <a:t>Infrastructure as Code, Cloud-init (Texte übernommen, für Azure angepasst)</a:t>
+              <a:t>Infrastructure as Code, Cloud-init (Kapitelnamen; Texte übernommen, für Azure angepasst)</a:t>
             </a:r>
             <a:endParaRPr lang="en-US" sz="1800" dirty="0"/>
           </a:p>
@@ -5079,7 +5079,7 @@
                   <a:srgbClr val="27303A"/>
                 </a:solidFill>
               </a:rPr>
-              <a:t>Infrastructure as Code</a:t>
+              <a:t>Infrastruktur als Code (Infrastructure as Code)</a:t>
             </a:r>
             <a:endParaRPr lang="en-US" sz="3400" dirty="0"/>
           </a:p>
@@ -6370,7 +6370,7 @@
                   <a:srgbClr val="27303A"/>
                 </a:solidFill>
               </a:rPr>
-              <a:t>Ein Storage Account in Bicep</a:t>
+              <a:t>Ein Speicherkonto in Bicep</a:t>
             </a:r>
             <a:endParaRPr lang="en-US" sz="3400" dirty="0"/>
           </a:p>

--- a/praesentationen/input-07-automatisierung.pptx
+++ b/praesentationen/input-07-automatisierung.pptx
@@ -119,7 +119,7 @@
   <p:extLst>
     <p:ext uri="{521415D9-36F7-43E2-AB2F-B90AF26B5E84}">
       <p14:sectionLst xmlns:p14="http://schemas.microsoft.com/office/powerpoint/2010/main">
-        <p14:section name="IaC" id="{6737735b-c41b-8d29-3147-040919e95d0a}">
+        <p14:section name="IaC" id="{6a3d2761-908b-0103-38ab-5569b1396d95}">
           <p14:sldIdLst>
             <p14:sldId id="256"/>
             <p14:sldId id="257"/>
@@ -129,7 +129,7 @@
             <p14:sldId id="261"/>
           </p14:sldIdLst>
         </p14:section>
-        <p14:section name="cloud-init" id="{fe6930d5-eb1c-19f1-bf07-b3509a92fd13}">
+        <p14:section name="cloud-init" id="{d215d72b-d7f8-4f49-9242-ffb445cd3b8b}">
           <p14:sldIdLst>
             <p14:sldId id="262"/>
             <p14:sldId id="263"/>
@@ -1678,7 +1678,7 @@
     <p:bg>
       <p:bgPr>
         <a:solidFill>
-          <a:srgbClr val="27303A"/>
+          <a:srgbClr val="FFFFFF"/>
         </a:solidFill>
       </p:bgPr>
     </p:bg>
@@ -1698,7 +1698,7 @@
       </p:grpSpPr>
       <p:pic>
         <p:nvPicPr>
-          <p:cNvPr id="2" name="Image 0" descr="C:\Users\Thanam\AppData\Local\Temp\claude\c--Projekt-Trainings-azure-basics-training\a9e0bf4e-0d08-4082-a38a-5b8886538508\scratchpad\pptx\assets\logo-hell.png">    </p:cNvPr>
+          <p:cNvPr id="2" name="Image 0" descr="C:\Users\Thanam\AppData\Local\Temp\claude\c--Projekt-Trainings-azure-basics-training\a7a6b8eb-22f3-4b42-aecc-5af05d1502b1\scratchpad\folien\assets\logo-dunkel.png">    </p:cNvPr>
           <p:cNvPicPr>
             <a:picLocks noChangeAspect="1"/>
           </p:cNvPicPr>
@@ -1722,7 +1722,7 @@
       </p:pic>
       <p:pic>
         <p:nvPicPr>
-          <p:cNvPr id="3" name="Image 1" descr="C:\Users\Thanam\AppData\Local\Temp\claude\c--Projekt-Trainings-azure-basics-training\a9e0bf4e-0d08-4082-a38a-5b8886538508\scratchpad\pptx\assets\wolke.png">    </p:cNvPr>
+          <p:cNvPr id="3" name="Image 1" descr="C:\Users\Thanam\AppData\Local\Temp\claude\c--Projekt-Trainings-azure-basics-training\a7a6b8eb-22f3-4b42-aecc-5af05d1502b1\scratchpad\folien\assets\wolke.png">    </p:cNvPr>
           <p:cNvPicPr>
             <a:picLocks noChangeAspect="1"/>
           </p:cNvPicPr>
@@ -1770,7 +1770,7 @@
               <a:buNone/>
               <a:defRPr lang="en-US" sz="4400" b="1" dirty="0">
                 <a:solidFill>
-                  <a:srgbClr val="FFFFFF"/>
+                  <a:srgbClr val="27303A"/>
                 </a:solidFill>
               </a:defRPr>
             </a:lvl1pPr>
@@ -1809,7 +1809,7 @@
               <a:buNone/>
               <a:defRPr lang="en-US" sz="2000" dirty="0">
                 <a:solidFill>
-                  <a:srgbClr val="DEE2FB"/>
+                  <a:srgbClr val="006FAD"/>
                 </a:solidFill>
               </a:defRPr>
             </a:lvl1pPr>
@@ -1849,7 +1849,7 @@
             <a:r>
               <a:rPr lang="en-US" sz="1200" dirty="0">
                 <a:solidFill>
-                  <a:srgbClr val="DEE2FB"/>
+                  <a:srgbClr val="6F6F6F"/>
                 </a:solidFill>
               </a:rPr>
               <a:t>Kanton Zürich · ICT-Grundbildung · PAT Cloud Solutions</a:t>
@@ -1872,7 +1872,7 @@
     <p:bg>
       <p:bgPr>
         <a:solidFill>
-          <a:srgbClr val="006FAD"/>
+          <a:srgbClr val="F7F7F7"/>
         </a:solidFill>
       </p:bgPr>
     </p:bg>
@@ -1892,7 +1892,7 @@
       </p:grpSpPr>
       <p:pic>
         <p:nvPicPr>
-          <p:cNvPr id="2" name="Image 0" descr="C:\Users\Thanam\AppData\Local\Temp\claude\c--Projekt-Trainings-azure-basics-training\a9e0bf4e-0d08-4082-a38a-5b8886538508\scratchpad\pptx\assets\wolke.png">    </p:cNvPr>
+          <p:cNvPr id="2" name="Image 0" descr="C:\Users\Thanam\AppData\Local\Temp\claude\c--Projekt-Trainings-azure-basics-training\a7a6b8eb-22f3-4b42-aecc-5af05d1502b1\scratchpad\folien\assets\wolke.png">    </p:cNvPr>
           <p:cNvPicPr>
             <a:picLocks noChangeAspect="1"/>
           </p:cNvPicPr>
@@ -1916,7 +1916,7 @@
       </p:pic>
       <p:pic>
         <p:nvPicPr>
-          <p:cNvPr id="3" name="Image 1" descr="C:\Users\Thanam\AppData\Local\Temp\claude\c--Projekt-Trainings-azure-basics-training\a9e0bf4e-0d08-4082-a38a-5b8886538508\scratchpad\pptx\assets\logo-hell.png">    </p:cNvPr>
+          <p:cNvPr id="3" name="Image 1" descr="C:\Users\Thanam\AppData\Local\Temp\claude\c--Projekt-Trainings-azure-basics-training\a7a6b8eb-22f3-4b42-aecc-5af05d1502b1\scratchpad\folien\assets\logo-dunkel.png">    </p:cNvPr>
           <p:cNvPicPr>
             <a:picLocks noChangeAspect="1"/>
           </p:cNvPicPr>
@@ -1964,7 +1964,7 @@
               <a:buNone/>
               <a:defRPr lang="en-US" sz="4000" b="1" dirty="0">
                 <a:solidFill>
-                  <a:srgbClr val="FFFFFF"/>
+                  <a:srgbClr val="27303A"/>
                 </a:solidFill>
               </a:defRPr>
             </a:lvl1pPr>
@@ -2003,7 +2003,7 @@
               <a:buNone/>
               <a:defRPr lang="en-US" sz="2000" dirty="0">
                 <a:solidFill>
-                  <a:srgbClr val="DEE2FB"/>
+                  <a:srgbClr val="006FAD"/>
                 </a:solidFill>
               </a:defRPr>
             </a:lvl1pPr>
@@ -2050,7 +2050,7 @@
       </p:grpSpPr>
       <p:pic>
         <p:nvPicPr>
-          <p:cNvPr id="2" name="Image 0" descr="C:\Users\Thanam\AppData\Local\Temp\claude\c--Projekt-Trainings-azure-basics-training\a9e0bf4e-0d08-4082-a38a-5b8886538508\scratchpad\pptx\assets\logo-dunkel.png">    </p:cNvPr>
+          <p:cNvPr id="2" name="Image 0" descr="C:\Users\Thanam\AppData\Local\Temp\claude\c--Projekt-Trainings-azure-basics-training\a7a6b8eb-22f3-4b42-aecc-5af05d1502b1\scratchpad\folien\assets\logo-dunkel.png">    </p:cNvPr>
           <p:cNvPicPr>
             <a:picLocks noChangeAspect="1"/>
           </p:cNvPicPr>
@@ -2206,7 +2206,7 @@
     <p:bg>
       <p:bgPr>
         <a:solidFill>
-          <a:srgbClr val="27303A"/>
+          <a:srgbClr val="FFFFFF"/>
         </a:solidFill>
       </p:bgPr>
     </p:bg>
@@ -2226,7 +2226,7 @@
       </p:grpSpPr>
       <p:pic>
         <p:nvPicPr>
-          <p:cNvPr id="2" name="Image 0" descr="C:\Users\Thanam\AppData\Local\Temp\claude\c--Projekt-Trainings-azure-basics-training\a9e0bf4e-0d08-4082-a38a-5b8886538508\scratchpad\pptx\assets\logo-hell.png">    </p:cNvPr>
+          <p:cNvPr id="2" name="Image 0" descr="C:\Users\Thanam\AppData\Local\Temp\claude\c--Projekt-Trainings-azure-basics-training\a7a6b8eb-22f3-4b42-aecc-5af05d1502b1\scratchpad\folien\assets\logo-dunkel.png">    </p:cNvPr>
           <p:cNvPicPr>
             <a:picLocks noChangeAspect="1"/>
           </p:cNvPicPr>
@@ -2274,7 +2274,7 @@
               <a:buNone/>
               <a:defRPr lang="en-US" sz="4000" b="1" dirty="0">
                 <a:solidFill>
-                  <a:srgbClr val="FFFFFF"/>
+                  <a:srgbClr val="27303A"/>
                 </a:solidFill>
               </a:defRPr>
             </a:lvl1pPr>
@@ -2313,7 +2313,7 @@
               <a:buNone/>
               <a:defRPr lang="en-US" sz="2000" dirty="0">
                 <a:solidFill>
-                  <a:srgbClr val="DEE2FB"/>
+                  <a:srgbClr val="006FAD"/>
                 </a:solidFill>
               </a:defRPr>
             </a:lvl1pPr>
@@ -2706,7 +2706,7 @@
             <a:r>
               <a:rPr lang="en-US" sz="4400" b="1" dirty="0">
                 <a:solidFill>
-                  <a:srgbClr val="FFFFFF"/>
+                  <a:srgbClr val="27303A"/>
                 </a:solidFill>
               </a:rPr>
               <a:t>Automatisierung: Bicep und cloud-init</a:t>
@@ -2744,7 +2744,7 @@
             <a:r>
               <a:rPr lang="en-US" sz="2000" dirty="0">
                 <a:solidFill>
-                  <a:srgbClr val="DEE2FB"/>
+                  <a:srgbClr val="006FAD"/>
                 </a:solidFill>
               </a:rPr>
               <a:t>Input 1 · Tag 5</a:t>
@@ -4066,7 +4066,7 @@
       </p:sp>
       <p:pic>
         <p:nvPicPr>
-          <p:cNvPr id="6" name="icon-FaQuestionCircle" descr="C:\Users\Thanam\AppData\Local\Temp\claude\c--Projekt-Trainings-azure-basics-training\a9e0bf4e-0d08-4082-a38a-5b8886538508\scratchpad\pptx\assets\icons\FaQuestionCircle.png">    </p:cNvPr>
+          <p:cNvPr id="6" name="icon-FaQuestionCircle" descr="C:\Users\Thanam\AppData\Local\Temp\claude\c--Projekt-Trainings-azure-basics-training\a7a6b8eb-22f3-4b42-aecc-5af05d1502b1\scratchpad\folien\assets\icons\FaQuestionCircle.png">    </p:cNvPr>
           <p:cNvPicPr>
             <a:picLocks noChangeAspect="1"/>
           </p:cNvPicPr>
@@ -4219,7 +4219,7 @@
       </p:sp>
       <p:pic>
         <p:nvPicPr>
-          <p:cNvPr id="11" name="icon-FaQuestionCircle" descr="C:\Users\Thanam\AppData\Local\Temp\claude\c--Projekt-Trainings-azure-basics-training\a9e0bf4e-0d08-4082-a38a-5b8886538508\scratchpad\pptx\assets\icons\FaQuestionCircle.png">    </p:cNvPr>
+          <p:cNvPr id="11" name="icon-FaQuestionCircle" descr="C:\Users\Thanam\AppData\Local\Temp\claude\c--Projekt-Trainings-azure-basics-training\a7a6b8eb-22f3-4b42-aecc-5af05d1502b1\scratchpad\folien\assets\icons\FaQuestionCircle.png">    </p:cNvPr>
           <p:cNvPicPr>
             <a:picLocks noChangeAspect="1"/>
           </p:cNvPicPr>
@@ -4372,7 +4372,7 @@
       </p:sp>
       <p:pic>
         <p:nvPicPr>
-          <p:cNvPr id="16" name="icon-FaQuestionCircle" descr="C:\Users\Thanam\AppData\Local\Temp\claude\c--Projekt-Trainings-azure-basics-training\a9e0bf4e-0d08-4082-a38a-5b8886538508\scratchpad\pptx\assets\icons\FaQuestionCircle.png">    </p:cNvPr>
+          <p:cNvPr id="16" name="icon-FaQuestionCircle" descr="C:\Users\Thanam\AppData\Local\Temp\claude\c--Projekt-Trainings-azure-basics-training\a7a6b8eb-22f3-4b42-aecc-5af05d1502b1\scratchpad\folien\assets\icons\FaQuestionCircle.png">    </p:cNvPr>
           <p:cNvPicPr>
             <a:picLocks noChangeAspect="1"/>
           </p:cNvPicPr>
@@ -4606,7 +4606,7 @@
       </p:sp>
       <p:pic>
         <p:nvPicPr>
-          <p:cNvPr id="4" name="icon-FaBook" descr="C:\Users\Thanam\AppData\Local\Temp\claude\c--Projekt-Trainings-azure-basics-training\a9e0bf4e-0d08-4082-a38a-5b8886538508\scratchpad\pptx\assets\icons\FaBook.png">    </p:cNvPr>
+          <p:cNvPr id="4" name="icon-FaBook" descr="C:\Users\Thanam\AppData\Local\Temp\claude\c--Projekt-Trainings-azure-basics-training\a7a6b8eb-22f3-4b42-aecc-5af05d1502b1\scratchpad\folien\assets\icons\FaBook.png">    </p:cNvPr>
           <p:cNvPicPr>
             <a:picLocks noChangeAspect="1"/>
           </p:cNvPicPr>
@@ -4705,7 +4705,7 @@
       </p:sp>
       <p:pic>
         <p:nvPicPr>
-          <p:cNvPr id="7" name="icon-FaGraduationCap" descr="C:\Users\Thanam\AppData\Local\Temp\claude\c--Projekt-Trainings-azure-basics-training\a9e0bf4e-0d08-4082-a38a-5b8886538508\scratchpad\pptx\assets\icons\FaGraduationCap.png">    </p:cNvPr>
+          <p:cNvPr id="7" name="icon-FaGraduationCap" descr="C:\Users\Thanam\AppData\Local\Temp\claude\c--Projekt-Trainings-azure-basics-training\a7a6b8eb-22f3-4b42-aecc-5af05d1502b1\scratchpad\folien\assets\icons\FaGraduationCap.png">    </p:cNvPr>
           <p:cNvPicPr>
             <a:picLocks noChangeAspect="1"/>
           </p:cNvPicPr>
@@ -4804,7 +4804,7 @@
       </p:sp>
       <p:pic>
         <p:nvPicPr>
-          <p:cNvPr id="10" name="icon-FaBook" descr="C:\Users\Thanam\AppData\Local\Temp\claude\c--Projekt-Trainings-azure-basics-training\a9e0bf4e-0d08-4082-a38a-5b8886538508\scratchpad\pptx\assets\icons\FaBook.png">    </p:cNvPr>
+          <p:cNvPr id="10" name="icon-FaBook" descr="C:\Users\Thanam\AppData\Local\Temp\claude\c--Projekt-Trainings-azure-basics-training\a7a6b8eb-22f3-4b42-aecc-5af05d1502b1\scratchpad\folien\assets\icons\FaBook.png">    </p:cNvPr>
           <p:cNvPicPr>
             <a:picLocks noChangeAspect="1"/>
           </p:cNvPicPr>
@@ -4975,7 +4975,7 @@
             <a:r>
               <a:rPr lang="en-US" sz="4000" b="1" dirty="0">
                 <a:solidFill>
-                  <a:srgbClr val="FFFFFF"/>
+                  <a:srgbClr val="27303A"/>
                 </a:solidFill>
               </a:rPr>
               <a:t>Jetzt du</a:t>
@@ -5013,7 +5013,7 @@
             <a:r>
               <a:rPr lang="en-US" sz="2000" dirty="0">
                 <a:solidFill>
-                  <a:srgbClr val="DEE2FB"/>
+                  <a:srgbClr val="006FAD"/>
                 </a:solidFill>
               </a:rPr>
               <a:t>Auftrag 5.1: VM mit cloud-init · danach Bicep</a:t>
@@ -5175,7 +5175,7 @@
       </p:sp>
       <p:pic>
         <p:nvPicPr>
-          <p:cNvPr id="6" name="icon-FaRedo" descr="C:\Users\Thanam\AppData\Local\Temp\claude\c--Projekt-Trainings-azure-basics-training\a9e0bf4e-0d08-4082-a38a-5b8886538508\scratchpad\pptx\assets\icons\FaRedo.png">    </p:cNvPr>
+          <p:cNvPr id="6" name="icon-FaRedo" descr="C:\Users\Thanam\AppData\Local\Temp\claude\c--Projekt-Trainings-azure-basics-training\a7a6b8eb-22f3-4b42-aecc-5af05d1502b1\scratchpad\folien\assets\icons\FaRedo.png">    </p:cNvPr>
           <p:cNvPicPr>
             <a:picLocks noChangeAspect="1"/>
           </p:cNvPicPr>
@@ -5328,7 +5328,7 @@
       </p:sp>
       <p:pic>
         <p:nvPicPr>
-          <p:cNvPr id="11" name="icon-FaTrashAlt" descr="C:\Users\Thanam\AppData\Local\Temp\claude\c--Projekt-Trainings-azure-basics-training\a9e0bf4e-0d08-4082-a38a-5b8886538508\scratchpad\pptx\assets\icons\FaTrashAlt.png">    </p:cNvPr>
+          <p:cNvPr id="11" name="icon-FaTrashAlt" descr="C:\Users\Thanam\AppData\Local\Temp\claude\c--Projekt-Trainings-azure-basics-training\a7a6b8eb-22f3-4b42-aecc-5af05d1502b1\scratchpad\folien\assets\icons\FaTrashAlt.png">    </p:cNvPr>
           <p:cNvPicPr>
             <a:picLocks noChangeAspect="1"/>
           </p:cNvPicPr>
@@ -5481,7 +5481,7 @@
       </p:sp>
       <p:pic>
         <p:nvPicPr>
-          <p:cNvPr id="16" name="icon-FaBook" descr="C:\Users\Thanam\AppData\Local\Temp\claude\c--Projekt-Trainings-azure-basics-training\a9e0bf4e-0d08-4082-a38a-5b8886538508\scratchpad\pptx\assets\icons\FaBook.png">    </p:cNvPr>
+          <p:cNvPr id="16" name="icon-FaBook" descr="C:\Users\Thanam\AppData\Local\Temp\claude\c--Projekt-Trainings-azure-basics-training\a7a6b8eb-22f3-4b42-aecc-5af05d1502b1\scratchpad\folien\assets\icons\FaBook.png">    </p:cNvPr>
           <p:cNvPicPr>
             <a:picLocks noChangeAspect="1"/>
           </p:cNvPicPr>
@@ -5742,7 +5742,7 @@
       </p:sp>
       <p:pic>
         <p:nvPicPr>
-          <p:cNvPr id="5" name="icon-FaRoute" descr="C:\Users\Thanam\AppData\Local\Temp\claude\c--Projekt-Trainings-azure-basics-training\a9e0bf4e-0d08-4082-a38a-5b8886538508\scratchpad\pptx\assets\icons\FaRoute.png">    </p:cNvPr>
+          <p:cNvPr id="5" name="icon-FaRoute" descr="C:\Users\Thanam\AppData\Local\Temp\claude\c--Projekt-Trainings-azure-basics-training\a7a6b8eb-22f3-4b42-aecc-5af05d1502b1\scratchpad\folien\assets\icons\FaRoute.png">    </p:cNvPr>
           <p:cNvPicPr>
             <a:picLocks noChangeAspect="1"/>
           </p:cNvPicPr>
@@ -5948,7 +5948,7 @@
       </p:sp>
       <p:pic>
         <p:nvPicPr>
-          <p:cNvPr id="10" name="icon-FaFlagCheckered" descr="C:\Users\Thanam\AppData\Local\Temp\claude\c--Projekt-Trainings-azure-basics-training\a9e0bf4e-0d08-4082-a38a-5b8886538508\scratchpad\pptx\assets\icons\FaFlagCheckered.png">    </p:cNvPr>
+          <p:cNvPr id="10" name="icon-FaFlagCheckered" descr="C:\Users\Thanam\AppData\Local\Temp\claude\c--Projekt-Trainings-azure-basics-training\a7a6b8eb-22f3-4b42-aecc-5af05d1502b1\scratchpad\folien\assets\icons\FaFlagCheckered.png">    </p:cNvPr>
           <p:cNvPicPr>
             <a:picLocks noChangeAspect="1"/>
           </p:cNvPicPr>
@@ -7389,7 +7389,7 @@
             <a:r>
               <a:rPr lang="en-US" sz="4000" b="1" dirty="0">
                 <a:solidFill>
-                  <a:srgbClr val="FFFFFF"/>
+                  <a:srgbClr val="27303A"/>
                 </a:solidFill>
               </a:rPr>
               <a:t>cloud-init</a:t>
@@ -7427,7 +7427,7 @@
             <a:r>
               <a:rPr lang="en-US" sz="2000" dirty="0">
                 <a:solidFill>
-                  <a:srgbClr val="DEE2FB"/>
+                  <a:srgbClr val="006FAD"/>
                 </a:solidFill>
               </a:rPr>
               <a:t>Die VM beim ersten Start einrichten</a:t>
@@ -8063,7 +8063,7 @@
       </p:sp>
       <p:pic>
         <p:nvPicPr>
-          <p:cNvPr id="5" name="icon-FaRocket" descr="C:\Users\Thanam\AppData\Local\Temp\claude\c--Projekt-Trainings-azure-basics-training\a9e0bf4e-0d08-4082-a38a-5b8886538508\scratchpad\pptx\assets\icons\FaRocket.png">    </p:cNvPr>
+          <p:cNvPr id="5" name="icon-FaRocket" descr="C:\Users\Thanam\AppData\Local\Temp\claude\c--Projekt-Trainings-azure-basics-training\a7a6b8eb-22f3-4b42-aecc-5af05d1502b1\scratchpad\folien\assets\icons\FaRocket.png">    </p:cNvPr>
           <p:cNvPicPr>
             <a:picLocks noChangeAspect="1"/>
           </p:cNvPicPr>
@@ -8216,7 +8216,7 @@
       </p:sp>
       <p:pic>
         <p:nvPicPr>
-          <p:cNvPr id="10" name="icon-FaExclamationTriangle" descr="C:\Users\Thanam\AppData\Local\Temp\claude\c--Projekt-Trainings-azure-basics-training\a9e0bf4e-0d08-4082-a38a-5b8886538508\scratchpad\pptx\assets\icons\FaExclamationTriangle.png">    </p:cNvPr>
+          <p:cNvPr id="10" name="icon-FaExclamationTriangle" descr="C:\Users\Thanam\AppData\Local\Temp\claude\c--Projekt-Trainings-azure-basics-training\a7a6b8eb-22f3-4b42-aecc-5af05d1502b1\scratchpad\folien\assets\icons\FaExclamationTriangle.png">    </p:cNvPr>
           <p:cNvPicPr>
             <a:picLocks noChangeAspect="1"/>
           </p:cNvPicPr>
@@ -8369,7 +8369,7 @@
       </p:sp>
       <p:pic>
         <p:nvPicPr>
-          <p:cNvPr id="15" name="icon-FaSearch" descr="C:\Users\Thanam\AppData\Local\Temp\claude\c--Projekt-Trainings-azure-basics-training\a9e0bf4e-0d08-4082-a38a-5b8886538508\scratchpad\pptx\assets\icons\FaSearch.png">    </p:cNvPr>
+          <p:cNvPr id="15" name="icon-FaSearch" descr="C:\Users\Thanam\AppData\Local\Temp\claude\c--Projekt-Trainings-azure-basics-training\a7a6b8eb-22f3-4b42-aecc-5af05d1502b1\scratchpad\folien\assets\icons\FaSearch.png">    </p:cNvPr>
           <p:cNvPicPr>
             <a:picLocks noChangeAspect="1"/>
           </p:cNvPicPr>
